--- a/cours/Module Informatique ENS/Département de français/ENS 2ème année/TD_Informatique_ENS_2ème_année_FR.pptx
+++ b/cours/Module Informatique ENS/Département de français/ENS 2ème année/TD_Informatique_ENS_2ème_année_FR.pptx
@@ -2845,7 +2845,7 @@
           <a:solidFill>
             <a:schemeClr val="tx1"/>
           </a:solidFill>
-          <a:latin typeface="+mj-lt"/>
+          <a:latin typeface="Poppins"/>
           <a:ea typeface="+mj-ea"/>
           <a:cs typeface="+mj-cs"/>
         </a:defRPr>
@@ -2862,7 +2862,7 @@
           <a:solidFill>
             <a:schemeClr val="tx1"/>
           </a:solidFill>
-          <a:latin typeface="+mn-lt"/>
+          <a:latin typeface="Poppins"/>
           <a:ea typeface="+mn-ea"/>
           <a:cs typeface="+mn-cs"/>
         </a:defRPr>
@@ -2877,7 +2877,7 @@
           <a:solidFill>
             <a:schemeClr val="tx1"/>
           </a:solidFill>
-          <a:latin typeface="+mn-lt"/>
+          <a:latin typeface="Poppins"/>
           <a:ea typeface="+mn-ea"/>
           <a:cs typeface="+mn-cs"/>
         </a:defRPr>
@@ -2892,7 +2892,7 @@
           <a:solidFill>
             <a:schemeClr val="tx1"/>
           </a:solidFill>
-          <a:latin typeface="+mn-lt"/>
+          <a:latin typeface="Poppins"/>
           <a:ea typeface="+mn-ea"/>
           <a:cs typeface="+mn-cs"/>
         </a:defRPr>
@@ -2907,7 +2907,7 @@
           <a:solidFill>
             <a:schemeClr val="tx1"/>
           </a:solidFill>
-          <a:latin typeface="+mn-lt"/>
+          <a:latin typeface="Poppins"/>
           <a:ea typeface="+mn-ea"/>
           <a:cs typeface="+mn-cs"/>
         </a:defRPr>
@@ -2922,7 +2922,7 @@
           <a:solidFill>
             <a:schemeClr val="tx1"/>
           </a:solidFill>
-          <a:latin typeface="+mn-lt"/>
+          <a:latin typeface="Poppins"/>
           <a:ea typeface="+mn-ea"/>
           <a:cs typeface="+mn-cs"/>
         </a:defRPr>
@@ -2937,7 +2937,7 @@
           <a:solidFill>
             <a:schemeClr val="tx1"/>
           </a:solidFill>
-          <a:latin typeface="+mn-lt"/>
+          <a:latin typeface="Poppins"/>
           <a:ea typeface="+mn-ea"/>
           <a:cs typeface="+mn-cs"/>
         </a:defRPr>
@@ -2952,7 +2952,7 @@
           <a:solidFill>
             <a:schemeClr val="tx1"/>
           </a:solidFill>
-          <a:latin typeface="+mn-lt"/>
+          <a:latin typeface="Poppins"/>
           <a:ea typeface="+mn-ea"/>
           <a:cs typeface="+mn-cs"/>
         </a:defRPr>
@@ -2967,7 +2967,7 @@
           <a:solidFill>
             <a:schemeClr val="tx1"/>
           </a:solidFill>
-          <a:latin typeface="+mn-lt"/>
+          <a:latin typeface="Poppins"/>
           <a:ea typeface="+mn-ea"/>
           <a:cs typeface="+mn-cs"/>
         </a:defRPr>
@@ -2982,7 +2982,7 @@
           <a:solidFill>
             <a:schemeClr val="tx1"/>
           </a:solidFill>
-          <a:latin typeface="+mn-lt"/>
+          <a:latin typeface="Poppins"/>
           <a:ea typeface="+mn-ea"/>
           <a:cs typeface="+mn-cs"/>
         </a:defRPr>
@@ -2997,7 +2997,7 @@
           <a:solidFill>
             <a:schemeClr val="tx1"/>
           </a:solidFill>
-          <a:latin typeface="+mn-lt"/>
+          <a:latin typeface="Poppins"/>
           <a:ea typeface="+mn-ea"/>
           <a:cs typeface="+mn-cs"/>
         </a:defRPr>
@@ -3007,7 +3007,7 @@
           <a:solidFill>
             <a:schemeClr val="tx1"/>
           </a:solidFill>
-          <a:latin typeface="+mn-lt"/>
+          <a:latin typeface="Poppins"/>
           <a:ea typeface="+mn-ea"/>
           <a:cs typeface="+mn-cs"/>
         </a:defRPr>
@@ -3017,7 +3017,7 @@
           <a:solidFill>
             <a:schemeClr val="tx1"/>
           </a:solidFill>
-          <a:latin typeface="+mn-lt"/>
+          <a:latin typeface="Poppins"/>
           <a:ea typeface="+mn-ea"/>
           <a:cs typeface="+mn-cs"/>
         </a:defRPr>
@@ -3027,7 +3027,7 @@
           <a:solidFill>
             <a:schemeClr val="tx1"/>
           </a:solidFill>
-          <a:latin typeface="+mn-lt"/>
+          <a:latin typeface="Poppins"/>
           <a:ea typeface="+mn-ea"/>
           <a:cs typeface="+mn-cs"/>
         </a:defRPr>
@@ -3037,7 +3037,7 @@
           <a:solidFill>
             <a:schemeClr val="tx1"/>
           </a:solidFill>
-          <a:latin typeface="+mn-lt"/>
+          <a:latin typeface="Poppins"/>
           <a:ea typeface="+mn-ea"/>
           <a:cs typeface="+mn-cs"/>
         </a:defRPr>
@@ -3047,7 +3047,7 @@
           <a:solidFill>
             <a:schemeClr val="tx1"/>
           </a:solidFill>
-          <a:latin typeface="+mn-lt"/>
+          <a:latin typeface="Poppins"/>
           <a:ea typeface="+mn-ea"/>
           <a:cs typeface="+mn-cs"/>
         </a:defRPr>
@@ -3057,7 +3057,7 @@
           <a:solidFill>
             <a:schemeClr val="tx1"/>
           </a:solidFill>
-          <a:latin typeface="+mn-lt"/>
+          <a:latin typeface="Poppins"/>
           <a:ea typeface="+mn-ea"/>
           <a:cs typeface="+mn-cs"/>
         </a:defRPr>
@@ -3067,7 +3067,7 @@
           <a:solidFill>
             <a:schemeClr val="tx1"/>
           </a:solidFill>
-          <a:latin typeface="+mn-lt"/>
+          <a:latin typeface="Poppins"/>
           <a:ea typeface="+mn-ea"/>
           <a:cs typeface="+mn-cs"/>
         </a:defRPr>
@@ -3077,7 +3077,7 @@
           <a:solidFill>
             <a:schemeClr val="tx1"/>
           </a:solidFill>
-          <a:latin typeface="+mn-lt"/>
+          <a:latin typeface="Poppins"/>
           <a:ea typeface="+mn-ea"/>
           <a:cs typeface="+mn-cs"/>
         </a:defRPr>
@@ -3163,13 +3163,52 @@
           <a:p>
             <a:pPr algn="ctr">
               <a:defRPr sz="900">
-                <a:solidFill>
-                  <a:srgbClr val="404040"/>
-                </a:solidFill>
+                <a:solidFill>val="45586A"/&gt;</a:solidFill>
               </a:defRPr>
             </a:pPr>
             <a:r>
               <a:t>TD Informatique — ENS 2ème année  •  Diapositive 1/10</a:t>
+            </a:r>
+          </a:p>
+        </p:txBody>
+      </p:sp>
+      <p:sp>
+        <p:nvSpPr>
+          <p:cNvPr id="990001" name="Pied de page FLE"/>
+          <p:cNvSpPr>
+            <a:spLocks noGrp="1"/>
+          </p:cNvSpPr>
+          <p:nvPr/>
+        </p:nvSpPr>
+        <p:spPr>
+          <a:xfrm>
+            <a:off x="3611880" y="-137160"/>
+            <a:ext cx="4572000" cy="274320"/>
+          </a:xfrm>
+          <a:prstGeom prst="rect">
+            <a:avLst/>
+          </a:prstGeom>
+        </p:spPr>
+        <p:txBody>
+          <a:bodyPr anchor="b"/>
+          <a:lstStyle/>
+          <a:p>
+            <a:pPr algn="r">
+              <a:defRPr sz="900">
+                <a:solidFill>
+                  <a:srgbClr val="9AA7B6"/>
+                </a:solidFill>
+                <a:latin typeface="Poppins"/>
+              </a:defRPr>
+            </a:pPr>
+            <a:r>
+              <a:rPr lang="fr-FR" sz="900">
+                <a:solidFill>
+                  <a:srgbClr val="9AA7B6"/>
+                </a:solidFill>
+                <a:latin typeface="Poppins"/>
+              </a:rPr>
+              <a:t>Université de Mostaganem — Dr. Madani BELACEL</a:t>
             </a:r>
           </a:p>
         </p:txBody>
@@ -3272,13 +3311,52 @@
           <a:p>
             <a:pPr algn="ctr">
               <a:defRPr sz="900">
-                <a:solidFill>
-                  <a:srgbClr val="404040"/>
-                </a:solidFill>
+                <a:solidFill>val="45586A"/&gt;</a:solidFill>
               </a:defRPr>
             </a:pPr>
             <a:r>
               <a:t>TD Informatique — ENS 2ème année  •  Diapositive 10/10</a:t>
+            </a:r>
+          </a:p>
+        </p:txBody>
+      </p:sp>
+      <p:sp>
+        <p:nvSpPr>
+          <p:cNvPr id="990001" name="Pied de page FLE"/>
+          <p:cNvSpPr>
+            <a:spLocks noGrp="1"/>
+          </p:cNvSpPr>
+          <p:nvPr/>
+        </p:nvSpPr>
+        <p:spPr>
+          <a:xfrm>
+            <a:off x="3611880" y="-137160"/>
+            <a:ext cx="4572000" cy="274320"/>
+          </a:xfrm>
+          <a:prstGeom prst="rect">
+            <a:avLst/>
+          </a:prstGeom>
+        </p:spPr>
+        <p:txBody>
+          <a:bodyPr anchor="b"/>
+          <a:lstStyle/>
+          <a:p>
+            <a:pPr algn="r">
+              <a:defRPr sz="900">
+                <a:solidFill>
+                  <a:srgbClr val="9AA7B6"/>
+                </a:solidFill>
+                <a:latin typeface="Poppins"/>
+              </a:defRPr>
+            </a:pPr>
+            <a:r>
+              <a:rPr lang="fr-FR" sz="900">
+                <a:solidFill>
+                  <a:srgbClr val="9AA7B6"/>
+                </a:solidFill>
+                <a:latin typeface="Poppins"/>
+              </a:rPr>
+              <a:t>Université de Mostaganem — Dr. Madani BELACEL</a:t>
             </a:r>
           </a:p>
         </p:txBody>
@@ -3405,13 +3483,52 @@
           <a:p>
             <a:pPr algn="ctr">
               <a:defRPr sz="900">
-                <a:solidFill>
-                  <a:srgbClr val="404040"/>
-                </a:solidFill>
+                <a:solidFill>val="45586A"/&gt;</a:solidFill>
               </a:defRPr>
             </a:pPr>
             <a:r>
               <a:t>TD Informatique — ENS 2ème année  •  Diapositive 2/10</a:t>
+            </a:r>
+          </a:p>
+        </p:txBody>
+      </p:sp>
+      <p:sp>
+        <p:nvSpPr>
+          <p:cNvPr id="990001" name="Pied de page FLE"/>
+          <p:cNvSpPr>
+            <a:spLocks noGrp="1"/>
+          </p:cNvSpPr>
+          <p:nvPr/>
+        </p:nvSpPr>
+        <p:spPr>
+          <a:xfrm>
+            <a:off x="3611880" y="-137160"/>
+            <a:ext cx="4572000" cy="274320"/>
+          </a:xfrm>
+          <a:prstGeom prst="rect">
+            <a:avLst/>
+          </a:prstGeom>
+        </p:spPr>
+        <p:txBody>
+          <a:bodyPr anchor="b"/>
+          <a:lstStyle/>
+          <a:p>
+            <a:pPr algn="r">
+              <a:defRPr sz="900">
+                <a:solidFill>
+                  <a:srgbClr val="9AA7B6"/>
+                </a:solidFill>
+                <a:latin typeface="Poppins"/>
+              </a:defRPr>
+            </a:pPr>
+            <a:r>
+              <a:rPr lang="fr-FR" sz="900">
+                <a:solidFill>
+                  <a:srgbClr val="9AA7B6"/>
+                </a:solidFill>
+                <a:latin typeface="Poppins"/>
+              </a:rPr>
+              <a:t>Université de Mostaganem — Dr. Madani BELACEL</a:t>
             </a:r>
           </a:p>
         </p:txBody>
@@ -3514,13 +3631,52 @@
           <a:p>
             <a:pPr algn="ctr">
               <a:defRPr sz="900">
-                <a:solidFill>
-                  <a:srgbClr val="404040"/>
-                </a:solidFill>
+                <a:solidFill>val="45586A"/&gt;</a:solidFill>
               </a:defRPr>
             </a:pPr>
             <a:r>
               <a:t>TD Informatique — ENS 2ème année  •  Diapositive 3/10</a:t>
+            </a:r>
+          </a:p>
+        </p:txBody>
+      </p:sp>
+      <p:sp>
+        <p:nvSpPr>
+          <p:cNvPr id="990001" name="Pied de page FLE"/>
+          <p:cNvSpPr>
+            <a:spLocks noGrp="1"/>
+          </p:cNvSpPr>
+          <p:nvPr/>
+        </p:nvSpPr>
+        <p:spPr>
+          <a:xfrm>
+            <a:off x="3611880" y="-137160"/>
+            <a:ext cx="4572000" cy="274320"/>
+          </a:xfrm>
+          <a:prstGeom prst="rect">
+            <a:avLst/>
+          </a:prstGeom>
+        </p:spPr>
+        <p:txBody>
+          <a:bodyPr anchor="b"/>
+          <a:lstStyle/>
+          <a:p>
+            <a:pPr algn="r">
+              <a:defRPr sz="900">
+                <a:solidFill>
+                  <a:srgbClr val="9AA7B6"/>
+                </a:solidFill>
+                <a:latin typeface="Poppins"/>
+              </a:defRPr>
+            </a:pPr>
+            <a:r>
+              <a:rPr lang="fr-FR" sz="900">
+                <a:solidFill>
+                  <a:srgbClr val="9AA7B6"/>
+                </a:solidFill>
+                <a:latin typeface="Poppins"/>
+              </a:rPr>
+              <a:t>Université de Mostaganem — Dr. Madani BELACEL</a:t>
             </a:r>
           </a:p>
         </p:txBody>
@@ -3623,13 +3779,52 @@
           <a:p>
             <a:pPr algn="ctr">
               <a:defRPr sz="900">
-                <a:solidFill>
-                  <a:srgbClr val="404040"/>
-                </a:solidFill>
+                <a:solidFill>val="45586A"/&gt;</a:solidFill>
               </a:defRPr>
             </a:pPr>
             <a:r>
               <a:t>TD Informatique — ENS 2ème année  •  Diapositive 4/10</a:t>
+            </a:r>
+          </a:p>
+        </p:txBody>
+      </p:sp>
+      <p:sp>
+        <p:nvSpPr>
+          <p:cNvPr id="990001" name="Pied de page FLE"/>
+          <p:cNvSpPr>
+            <a:spLocks noGrp="1"/>
+          </p:cNvSpPr>
+          <p:nvPr/>
+        </p:nvSpPr>
+        <p:spPr>
+          <a:xfrm>
+            <a:off x="3611880" y="-137160"/>
+            <a:ext cx="4572000" cy="274320"/>
+          </a:xfrm>
+          <a:prstGeom prst="rect">
+            <a:avLst/>
+          </a:prstGeom>
+        </p:spPr>
+        <p:txBody>
+          <a:bodyPr anchor="b"/>
+          <a:lstStyle/>
+          <a:p>
+            <a:pPr algn="r">
+              <a:defRPr sz="900">
+                <a:solidFill>
+                  <a:srgbClr val="9AA7B6"/>
+                </a:solidFill>
+                <a:latin typeface="Poppins"/>
+              </a:defRPr>
+            </a:pPr>
+            <a:r>
+              <a:rPr lang="fr-FR" sz="900">
+                <a:solidFill>
+                  <a:srgbClr val="9AA7B6"/>
+                </a:solidFill>
+                <a:latin typeface="Poppins"/>
+              </a:rPr>
+              <a:t>Université de Mostaganem — Dr. Madani BELACEL</a:t>
             </a:r>
           </a:p>
         </p:txBody>
@@ -3732,13 +3927,52 @@
           <a:p>
             <a:pPr algn="ctr">
               <a:defRPr sz="900">
-                <a:solidFill>
-                  <a:srgbClr val="404040"/>
-                </a:solidFill>
+                <a:solidFill>val="45586A"/&gt;</a:solidFill>
               </a:defRPr>
             </a:pPr>
             <a:r>
               <a:t>TD Informatique — ENS 2ème année  •  Diapositive 5/10</a:t>
+            </a:r>
+          </a:p>
+        </p:txBody>
+      </p:sp>
+      <p:sp>
+        <p:nvSpPr>
+          <p:cNvPr id="990001" name="Pied de page FLE"/>
+          <p:cNvSpPr>
+            <a:spLocks noGrp="1"/>
+          </p:cNvSpPr>
+          <p:nvPr/>
+        </p:nvSpPr>
+        <p:spPr>
+          <a:xfrm>
+            <a:off x="3611880" y="-137160"/>
+            <a:ext cx="4572000" cy="274320"/>
+          </a:xfrm>
+          <a:prstGeom prst="rect">
+            <a:avLst/>
+          </a:prstGeom>
+        </p:spPr>
+        <p:txBody>
+          <a:bodyPr anchor="b"/>
+          <a:lstStyle/>
+          <a:p>
+            <a:pPr algn="r">
+              <a:defRPr sz="900">
+                <a:solidFill>
+                  <a:srgbClr val="9AA7B6"/>
+                </a:solidFill>
+                <a:latin typeface="Poppins"/>
+              </a:defRPr>
+            </a:pPr>
+            <a:r>
+              <a:rPr lang="fr-FR" sz="900">
+                <a:solidFill>
+                  <a:srgbClr val="9AA7B6"/>
+                </a:solidFill>
+                <a:latin typeface="Poppins"/>
+              </a:rPr>
+              <a:t>Université de Mostaganem — Dr. Madani BELACEL</a:t>
             </a:r>
           </a:p>
         </p:txBody>
@@ -3841,13 +4075,52 @@
           <a:p>
             <a:pPr algn="ctr">
               <a:defRPr sz="900">
-                <a:solidFill>
-                  <a:srgbClr val="404040"/>
-                </a:solidFill>
+                <a:solidFill>val="45586A"/&gt;</a:solidFill>
               </a:defRPr>
             </a:pPr>
             <a:r>
               <a:t>TD Informatique — ENS 2ème année  •  Diapositive 6/10</a:t>
+            </a:r>
+          </a:p>
+        </p:txBody>
+      </p:sp>
+      <p:sp>
+        <p:nvSpPr>
+          <p:cNvPr id="990001" name="Pied de page FLE"/>
+          <p:cNvSpPr>
+            <a:spLocks noGrp="1"/>
+          </p:cNvSpPr>
+          <p:nvPr/>
+        </p:nvSpPr>
+        <p:spPr>
+          <a:xfrm>
+            <a:off x="3611880" y="-137160"/>
+            <a:ext cx="4572000" cy="274320"/>
+          </a:xfrm>
+          <a:prstGeom prst="rect">
+            <a:avLst/>
+          </a:prstGeom>
+        </p:spPr>
+        <p:txBody>
+          <a:bodyPr anchor="b"/>
+          <a:lstStyle/>
+          <a:p>
+            <a:pPr algn="r">
+              <a:defRPr sz="900">
+                <a:solidFill>
+                  <a:srgbClr val="9AA7B6"/>
+                </a:solidFill>
+                <a:latin typeface="Poppins"/>
+              </a:defRPr>
+            </a:pPr>
+            <a:r>
+              <a:rPr lang="fr-FR" sz="900">
+                <a:solidFill>
+                  <a:srgbClr val="9AA7B6"/>
+                </a:solidFill>
+                <a:latin typeface="Poppins"/>
+              </a:rPr>
+              <a:t>Université de Mostaganem — Dr. Madani BELACEL</a:t>
             </a:r>
           </a:p>
         </p:txBody>
@@ -3950,13 +4223,52 @@
           <a:p>
             <a:pPr algn="ctr">
               <a:defRPr sz="900">
-                <a:solidFill>
-                  <a:srgbClr val="404040"/>
-                </a:solidFill>
+                <a:solidFill>val="45586A"/&gt;</a:solidFill>
               </a:defRPr>
             </a:pPr>
             <a:r>
               <a:t>TD Informatique — ENS 2ème année  •  Diapositive 7/10</a:t>
+            </a:r>
+          </a:p>
+        </p:txBody>
+      </p:sp>
+      <p:sp>
+        <p:nvSpPr>
+          <p:cNvPr id="990001" name="Pied de page FLE"/>
+          <p:cNvSpPr>
+            <a:spLocks noGrp="1"/>
+          </p:cNvSpPr>
+          <p:nvPr/>
+        </p:nvSpPr>
+        <p:spPr>
+          <a:xfrm>
+            <a:off x="3611880" y="-137160"/>
+            <a:ext cx="4572000" cy="274320"/>
+          </a:xfrm>
+          <a:prstGeom prst="rect">
+            <a:avLst/>
+          </a:prstGeom>
+        </p:spPr>
+        <p:txBody>
+          <a:bodyPr anchor="b"/>
+          <a:lstStyle/>
+          <a:p>
+            <a:pPr algn="r">
+              <a:defRPr sz="900">
+                <a:solidFill>
+                  <a:srgbClr val="9AA7B6"/>
+                </a:solidFill>
+                <a:latin typeface="Poppins"/>
+              </a:defRPr>
+            </a:pPr>
+            <a:r>
+              <a:rPr lang="fr-FR" sz="900">
+                <a:solidFill>
+                  <a:srgbClr val="9AA7B6"/>
+                </a:solidFill>
+                <a:latin typeface="Poppins"/>
+              </a:rPr>
+              <a:t>Université de Mostaganem — Dr. Madani BELACEL</a:t>
             </a:r>
           </a:p>
         </p:txBody>
@@ -4067,13 +4379,52 @@
           <a:p>
             <a:pPr algn="ctr">
               <a:defRPr sz="900">
-                <a:solidFill>
-                  <a:srgbClr val="404040"/>
-                </a:solidFill>
+                <a:solidFill>val="45586A"/&gt;</a:solidFill>
               </a:defRPr>
             </a:pPr>
             <a:r>
               <a:t>TD Informatique — ENS 2ème année  •  Diapositive 8/10</a:t>
+            </a:r>
+          </a:p>
+        </p:txBody>
+      </p:sp>
+      <p:sp>
+        <p:nvSpPr>
+          <p:cNvPr id="990001" name="Pied de page FLE"/>
+          <p:cNvSpPr>
+            <a:spLocks noGrp="1"/>
+          </p:cNvSpPr>
+          <p:nvPr/>
+        </p:nvSpPr>
+        <p:spPr>
+          <a:xfrm>
+            <a:off x="3611880" y="-137160"/>
+            <a:ext cx="4572000" cy="274320"/>
+          </a:xfrm>
+          <a:prstGeom prst="rect">
+            <a:avLst/>
+          </a:prstGeom>
+        </p:spPr>
+        <p:txBody>
+          <a:bodyPr anchor="b"/>
+          <a:lstStyle/>
+          <a:p>
+            <a:pPr algn="r">
+              <a:defRPr sz="900">
+                <a:solidFill>
+                  <a:srgbClr val="9AA7B6"/>
+                </a:solidFill>
+                <a:latin typeface="Poppins"/>
+              </a:defRPr>
+            </a:pPr>
+            <a:r>
+              <a:rPr lang="fr-FR" sz="900">
+                <a:solidFill>
+                  <a:srgbClr val="9AA7B6"/>
+                </a:solidFill>
+                <a:latin typeface="Poppins"/>
+              </a:rPr>
+              <a:t>Université de Mostaganem — Dr. Madani BELACEL</a:t>
             </a:r>
           </a:p>
         </p:txBody>
@@ -4168,13 +4519,52 @@
           <a:p>
             <a:pPr algn="ctr">
               <a:defRPr sz="900">
-                <a:solidFill>
-                  <a:srgbClr val="404040"/>
-                </a:solidFill>
+                <a:solidFill>val="45586A"/&gt;</a:solidFill>
               </a:defRPr>
             </a:pPr>
             <a:r>
               <a:t>TD Informatique — ENS 2ème année  •  Diapositive 9/10</a:t>
+            </a:r>
+          </a:p>
+        </p:txBody>
+      </p:sp>
+      <p:sp>
+        <p:nvSpPr>
+          <p:cNvPr id="990001" name="Pied de page FLE"/>
+          <p:cNvSpPr>
+            <a:spLocks noGrp="1"/>
+          </p:cNvSpPr>
+          <p:nvPr/>
+        </p:nvSpPr>
+        <p:spPr>
+          <a:xfrm>
+            <a:off x="3611880" y="-137160"/>
+            <a:ext cx="4572000" cy="274320"/>
+          </a:xfrm>
+          <a:prstGeom prst="rect">
+            <a:avLst/>
+          </a:prstGeom>
+        </p:spPr>
+        <p:txBody>
+          <a:bodyPr anchor="b"/>
+          <a:lstStyle/>
+          <a:p>
+            <a:pPr algn="r">
+              <a:defRPr sz="900">
+                <a:solidFill>
+                  <a:srgbClr val="9AA7B6"/>
+                </a:solidFill>
+                <a:latin typeface="Poppins"/>
+              </a:defRPr>
+            </a:pPr>
+            <a:r>
+              <a:rPr lang="fr-FR" sz="900">
+                <a:solidFill>
+                  <a:srgbClr val="9AA7B6"/>
+                </a:solidFill>
+                <a:latin typeface="Poppins"/>
+              </a:rPr>
+              <a:t>Université de Mostaganem — Dr. Madani BELACEL</a:t>
             </a:r>
           </a:p>
         </p:txBody>
@@ -4233,7 +4623,7 @@
     </a:clrScheme>
     <a:fontScheme name="Office">
       <a:majorFont>
-        <a:latin typeface="Calibri"/>
+        <a:latin typeface="Poppins"/>
         <a:ea typeface=""/>
         <a:cs typeface=""/>
         <a:font script="Jpan" typeface="ＭＳ Ｐゴシック"/>
@@ -4268,7 +4658,7 @@
         <a:font script="Geor" typeface="Sylfaen"/>
       </a:majorFont>
       <a:minorFont>
-        <a:latin typeface="Calibri"/>
+        <a:latin typeface="Poppins"/>
         <a:ea typeface=""/>
         <a:cs typeface=""/>
         <a:font script="Jpan" typeface="ＭＳ Ｐゴシック"/>
